--- a/resources/presentations/Lunch-Is-Packed-Module-08-decoration-and-surface-design.pptx
+++ b/resources/presentations/Lunch-Is-Packed-Module-08-decoration-and-surface-design.pptx
@@ -2,20 +2,20 @@
 <file path=ppt/presentation.xml><?xml version="1.0" encoding="utf-8"?>
 <p:presentation xmlns:p="http://schemas.openxmlformats.org/presentationml/2006/main">
   <p:sldMasterIdLst>
-    <p:sldMasterId xmlns:r="http://schemas.openxmlformats.org/officeDocument/2006/relationships" id="2147483648" r:id="R984ea0b586004635"/>
+    <p:sldMasterId xmlns:r="http://schemas.openxmlformats.org/officeDocument/2006/relationships" id="2147483648" r:id="Rdd51e2d731ea4ea3"/>
   </p:sldMasterIdLst>
   <p:notesMasterIdLst>
-    <p:notesMasterId xmlns:r="http://schemas.openxmlformats.org/officeDocument/2006/relationships" r:id="Re3b5dc0700464981"/>
+    <p:notesMasterId xmlns:r="http://schemas.openxmlformats.org/officeDocument/2006/relationships" r:id="R330941288b934523"/>
   </p:notesMasterIdLst>
   <p:sldIdLst>
-    <p:sldId xmlns:r="http://schemas.openxmlformats.org/officeDocument/2006/relationships" id="256" r:id="Ra2f553a19d554505"/>
-    <p:sldId xmlns:r="http://schemas.openxmlformats.org/officeDocument/2006/relationships" id="257" r:id="R27424ab9e0b44af6"/>
-    <p:sldId xmlns:r="http://schemas.openxmlformats.org/officeDocument/2006/relationships" id="258" r:id="Rfb63bf1e70004914"/>
-    <p:sldId xmlns:r="http://schemas.openxmlformats.org/officeDocument/2006/relationships" id="259" r:id="Rd87de2c1a601471a"/>
-    <p:sldId xmlns:r="http://schemas.openxmlformats.org/officeDocument/2006/relationships" id="260" r:id="R5d0012a674634c37"/>
-    <p:sldId xmlns:r="http://schemas.openxmlformats.org/officeDocument/2006/relationships" id="261" r:id="Rf528733a0df049d8"/>
-    <p:sldId xmlns:r="http://schemas.openxmlformats.org/officeDocument/2006/relationships" id="262" r:id="Rd6006473ca824c1d"/>
-    <p:sldId xmlns:r="http://schemas.openxmlformats.org/officeDocument/2006/relationships" id="263" r:id="R527c0d6b08ca4178"/>
+    <p:sldId xmlns:r="http://schemas.openxmlformats.org/officeDocument/2006/relationships" id="256" r:id="Rf2eb90b08da2491c"/>
+    <p:sldId xmlns:r="http://schemas.openxmlformats.org/officeDocument/2006/relationships" id="257" r:id="Rf862b33fc5b0462b"/>
+    <p:sldId xmlns:r="http://schemas.openxmlformats.org/officeDocument/2006/relationships" id="258" r:id="R5d4feec17d3c4810"/>
+    <p:sldId xmlns:r="http://schemas.openxmlformats.org/officeDocument/2006/relationships" id="259" r:id="Rea46207e15bd43aa"/>
+    <p:sldId xmlns:r="http://schemas.openxmlformats.org/officeDocument/2006/relationships" id="260" r:id="Rdeae8e56cccc4d32"/>
+    <p:sldId xmlns:r="http://schemas.openxmlformats.org/officeDocument/2006/relationships" id="261" r:id="R83defcdab3e7491d"/>
+    <p:sldId xmlns:r="http://schemas.openxmlformats.org/officeDocument/2006/relationships" id="262" r:id="Rd0dab64c5b444ae6"/>
+    <p:sldId xmlns:r="http://schemas.openxmlformats.org/officeDocument/2006/relationships" id="263" r:id="Rc850ae6e166a4236"/>
   </p:sldIdLst>
   <p:sldSz cx="12192000" cy="6858000"/>
   <p:notesSz cx="6858000" cy="9144000"/>
@@ -1127,7 +1127,7 @@
   </p:cSld>
   <p:clrMap bg1="lt1" tx1="dk1" bg2="lt2" tx2="dk2" accent1="accent1" accent2="accent2" accent3="accent3" accent4="accent4" accent5="accent5" accent6="accent6" hlink="hlink" folHlink="folHlink"/>
   <p:sldLayoutIdLst>
-    <p:sldLayoutId xmlns:r="http://schemas.openxmlformats.org/officeDocument/2006/relationships" id="2147483649" r:id="R2bc44f154a5a425c"/>
+    <p:sldLayoutId xmlns:r="http://schemas.openxmlformats.org/officeDocument/2006/relationships" id="2147483649" r:id="R21497ee81c604154"/>
   </p:sldLayoutIdLst>
   <p:txStyles>
     <p:titleStyle>
@@ -1678,7 +1678,7 @@
           <p:cNvPr id="7" name="title-plane">
             <a:extLst xmlns:a="http://schemas.openxmlformats.org/drawingml/2006/main">
               <a:ext uri="{FF2B5EF4-FFF2-40B4-BE49-F238E27FC236}">
-                <a16:creationId xmlns:a16="http://schemas.microsoft.com/office/drawing/2014/main" id="{A7AF5518-22F5-4842-9A33-FFC09E60AACD}"/>
+                <a16:creationId xmlns:a16="http://schemas.microsoft.com/office/drawing/2014/main" id="{44F4B29F-EC74-4477-9650-410953A6592C}"/>
               </a:ext>
             </a:extLst>
           </p:cNvPr>
@@ -1713,8 +1713,8 @@
           <p:nvPr/>
         </p:nvPicPr>
         <p:blipFill>
-          <a:blip xmlns:r="http://schemas.openxmlformats.org/officeDocument/2006/relationships" xmlns:a="http://schemas.openxmlformats.org/drawingml/2006/main" r:embed="R9a4b55b8eff444f9"/>
-          <a:srcRect xmlns:a="http://schemas.openxmlformats.org/drawingml/2006/main" l="30134" t="0" r="30134" b="0"/>
+          <a:blip xmlns:r="http://schemas.openxmlformats.org/officeDocument/2006/relationships" xmlns:a="http://schemas.openxmlformats.org/drawingml/2006/main" r:embed="Ra3c7f419ac0749df"/>
+          <a:srcRect xmlns:a="http://schemas.openxmlformats.org/drawingml/2006/main" l="24074" t="0" r="24074" b="0"/>
           <a:stretch xmlns:a="http://schemas.openxmlformats.org/drawingml/2006/main">
             <a:fillRect l="0" t="0" r="0" b="0"/>
           </a:stretch>
@@ -1734,7 +1734,7 @@
           <p:cNvPr id="3" name="module-kicker">
             <a:extLst xmlns:a="http://schemas.openxmlformats.org/drawingml/2006/main">
               <a:ext uri="{FF2B5EF4-FFF2-40B4-BE49-F238E27FC236}">
-                <a16:creationId xmlns:a16="http://schemas.microsoft.com/office/drawing/2014/main" id="{2C6C1614-2936-4A66-975B-2ED4ED1031AF}"/>
+                <a16:creationId xmlns:a16="http://schemas.microsoft.com/office/drawing/2014/main" id="{895EB54D-A071-4E30-8EC7-CBEF762BCE85}"/>
               </a:ext>
             </a:extLst>
           </p:cNvPr>
@@ -1784,7 +1784,7 @@
           <p:cNvPr id="4" name="deck-title">
             <a:extLst xmlns:a="http://schemas.openxmlformats.org/drawingml/2006/main">
               <a:ext uri="{FF2B5EF4-FFF2-40B4-BE49-F238E27FC236}">
-                <a16:creationId xmlns:a16="http://schemas.microsoft.com/office/drawing/2014/main" id="{EEDBC2A7-D34A-4264-9544-125B6CF5CA15}"/>
+                <a16:creationId xmlns:a16="http://schemas.microsoft.com/office/drawing/2014/main" id="{329C7F14-3140-49F5-8297-1527EFF60179}"/>
               </a:ext>
             </a:extLst>
           </p:cNvPr>
@@ -1834,7 +1834,7 @@
           <p:cNvPr id="5" name="deck-subtitle">
             <a:extLst xmlns:a="http://schemas.openxmlformats.org/drawingml/2006/main">
               <a:ext uri="{FF2B5EF4-FFF2-40B4-BE49-F238E27FC236}">
-                <a16:creationId xmlns:a16="http://schemas.microsoft.com/office/drawing/2014/main" id="{BE46C32E-9CF7-41A6-9313-D67A482AE37C}"/>
+                <a16:creationId xmlns:a16="http://schemas.microsoft.com/office/drawing/2014/main" id="{B5CCAC3D-7ABF-4FC9-9019-4F09AA8845A1}"/>
               </a:ext>
             </a:extLst>
           </p:cNvPr>
@@ -1884,7 +1884,7 @@
           <p:cNvPr id="6" name="deck-footer">
             <a:extLst xmlns:a="http://schemas.openxmlformats.org/drawingml/2006/main">
               <a:ext uri="{FF2B5EF4-FFF2-40B4-BE49-F238E27FC236}">
-                <a16:creationId xmlns:a16="http://schemas.microsoft.com/office/drawing/2014/main" id="{FE8501C3-D601-4EE1-9721-4A12D03A3C14}"/>
+                <a16:creationId xmlns:a16="http://schemas.microsoft.com/office/drawing/2014/main" id="{CFF88233-A76B-4F8F-B75A-BFB3FFE168BF}"/>
               </a:ext>
             </a:extLst>
           </p:cNvPr>
@@ -1932,7 +1932,7 @@
     </p:spTree>
     <p:extLst>
       <p:ext uri="{BB962C8B-B14F-4D97-AF65-F5344CB8AC3E}">
-        <p14:creationId xmlns:p14="http://schemas.microsoft.com/office/powerpoint/2010/main" val="1080889632"/>
+        <p14:creationId xmlns:p14="http://schemas.microsoft.com/office/powerpoint/2010/main" val="1384117065"/>
       </p:ext>
     </p:extLst>
   </p:cSld>
@@ -1963,7 +1963,7 @@
           <p:cNvPr id="15" name="top-rule">
             <a:extLst xmlns:a="http://schemas.openxmlformats.org/drawingml/2006/main">
               <a:ext uri="{FF2B5EF4-FFF2-40B4-BE49-F238E27FC236}">
-                <a16:creationId xmlns:a16="http://schemas.microsoft.com/office/drawing/2014/main" id="{5C213186-DBE4-4131-8BC0-6FCB14E31A4F}"/>
+                <a16:creationId xmlns:a16="http://schemas.microsoft.com/office/drawing/2014/main" id="{70329127-D707-47E5-B162-7715B77E4AB8}"/>
               </a:ext>
             </a:extLst>
           </p:cNvPr>
@@ -1994,7 +1994,7 @@
           <p:cNvPr id="2" name="course-label">
             <a:extLst xmlns:a="http://schemas.openxmlformats.org/drawingml/2006/main">
               <a:ext uri="{FF2B5EF4-FFF2-40B4-BE49-F238E27FC236}">
-                <a16:creationId xmlns:a16="http://schemas.microsoft.com/office/drawing/2014/main" id="{26DD0209-05CB-489C-9AC9-4C401ECE56EC}"/>
+                <a16:creationId xmlns:a16="http://schemas.microsoft.com/office/drawing/2014/main" id="{9FECE1A2-A08F-44B1-9928-00B6BE14A0A1}"/>
               </a:ext>
             </a:extLst>
           </p:cNvPr>
@@ -2044,7 +2044,7 @@
           <p:cNvPr id="3" name="module-label">
             <a:extLst xmlns:a="http://schemas.openxmlformats.org/drawingml/2006/main">
               <a:ext uri="{FF2B5EF4-FFF2-40B4-BE49-F238E27FC236}">
-                <a16:creationId xmlns:a16="http://schemas.microsoft.com/office/drawing/2014/main" id="{15997162-5EA1-475D-A189-94E83B8010FD}"/>
+                <a16:creationId xmlns:a16="http://schemas.microsoft.com/office/drawing/2014/main" id="{1F9C16C4-5D43-4770-BCE7-38AFA15AF58E}"/>
               </a:ext>
             </a:extLst>
           </p:cNvPr>
@@ -2094,7 +2094,7 @@
           <p:cNvPr id="4" name="slide-title">
             <a:extLst xmlns:a="http://schemas.openxmlformats.org/drawingml/2006/main">
               <a:ext uri="{FF2B5EF4-FFF2-40B4-BE49-F238E27FC236}">
-                <a16:creationId xmlns:a16="http://schemas.microsoft.com/office/drawing/2014/main" id="{55817E22-B523-46C4-B36C-90A8DAFC6585}"/>
+                <a16:creationId xmlns:a16="http://schemas.microsoft.com/office/drawing/2014/main" id="{B091CC64-531C-49A5-BAEF-BC00B3E8C715}"/>
               </a:ext>
             </a:extLst>
           </p:cNvPr>
@@ -2144,7 +2144,7 @@
           <p:cNvPr id="5" name="slide-subtitle">
             <a:extLst xmlns:a="http://schemas.openxmlformats.org/drawingml/2006/main">
               <a:ext uri="{FF2B5EF4-FFF2-40B4-BE49-F238E27FC236}">
-                <a16:creationId xmlns:a16="http://schemas.microsoft.com/office/drawing/2014/main" id="{3588ECFB-BCF1-4C5D-BEC6-145EC3321173}"/>
+                <a16:creationId xmlns:a16="http://schemas.microsoft.com/office/drawing/2014/main" id="{7C56DCFA-F0AA-4B99-9446-AB7290D52D55}"/>
               </a:ext>
             </a:extLst>
           </p:cNvPr>
@@ -2194,7 +2194,7 @@
           <p:cNvPr id="6" name="bullet-1">
             <a:extLst xmlns:a="http://schemas.openxmlformats.org/drawingml/2006/main">
               <a:ext uri="{FF2B5EF4-FFF2-40B4-BE49-F238E27FC236}">
-                <a16:creationId xmlns:a16="http://schemas.microsoft.com/office/drawing/2014/main" id="{1CF2B6CB-75E5-49D7-9090-A8200919C3F4}"/>
+                <a16:creationId xmlns:a16="http://schemas.microsoft.com/office/drawing/2014/main" id="{B6966DED-EC44-4475-A88A-2AB802E648C1}"/>
               </a:ext>
             </a:extLst>
           </p:cNvPr>
@@ -2225,7 +2225,7 @@
           <p:cNvPr id="7" name="bullet-number-1">
             <a:extLst xmlns:a="http://schemas.openxmlformats.org/drawingml/2006/main">
               <a:ext uri="{FF2B5EF4-FFF2-40B4-BE49-F238E27FC236}">
-                <a16:creationId xmlns:a16="http://schemas.microsoft.com/office/drawing/2014/main" id="{95827143-BA12-4F8E-8547-6862198FF718}"/>
+                <a16:creationId xmlns:a16="http://schemas.microsoft.com/office/drawing/2014/main" id="{290E5366-A0FD-4B1C-B8FE-D036FD76A6CF}"/>
               </a:ext>
             </a:extLst>
           </p:cNvPr>
@@ -2275,7 +2275,7 @@
           <p:cNvPr id="8" name="bullet-copy-1">
             <a:extLst xmlns:a="http://schemas.openxmlformats.org/drawingml/2006/main">
               <a:ext uri="{FF2B5EF4-FFF2-40B4-BE49-F238E27FC236}">
-                <a16:creationId xmlns:a16="http://schemas.microsoft.com/office/drawing/2014/main" id="{E4D2618F-4113-4371-A4EB-777FCBA196D2}"/>
+                <a16:creationId xmlns:a16="http://schemas.microsoft.com/office/drawing/2014/main" id="{4E92AB59-FACF-4D84-B6B4-77C17BFAE856}"/>
               </a:ext>
             </a:extLst>
           </p:cNvPr>
@@ -2325,7 +2325,7 @@
           <p:cNvPr id="9" name="bullet-2">
             <a:extLst xmlns:a="http://schemas.openxmlformats.org/drawingml/2006/main">
               <a:ext uri="{FF2B5EF4-FFF2-40B4-BE49-F238E27FC236}">
-                <a16:creationId xmlns:a16="http://schemas.microsoft.com/office/drawing/2014/main" id="{B7FD0E55-C6AD-4D59-A8D1-CCC096F12BE9}"/>
+                <a16:creationId xmlns:a16="http://schemas.microsoft.com/office/drawing/2014/main" id="{8D6F9A8D-DB75-4756-8C5E-A32F9ED06797}"/>
               </a:ext>
             </a:extLst>
           </p:cNvPr>
@@ -2356,7 +2356,7 @@
           <p:cNvPr id="10" name="bullet-number-2">
             <a:extLst xmlns:a="http://schemas.openxmlformats.org/drawingml/2006/main">
               <a:ext uri="{FF2B5EF4-FFF2-40B4-BE49-F238E27FC236}">
-                <a16:creationId xmlns:a16="http://schemas.microsoft.com/office/drawing/2014/main" id="{0E0A4CD3-DC8D-497A-BAB1-FBDBA146DA3E}"/>
+                <a16:creationId xmlns:a16="http://schemas.microsoft.com/office/drawing/2014/main" id="{0EFB0D5C-442E-4657-AFAC-1C0E7A896FF8}"/>
               </a:ext>
             </a:extLst>
           </p:cNvPr>
@@ -2406,7 +2406,7 @@
           <p:cNvPr id="11" name="bullet-copy-2">
             <a:extLst xmlns:a="http://schemas.openxmlformats.org/drawingml/2006/main">
               <a:ext uri="{FF2B5EF4-FFF2-40B4-BE49-F238E27FC236}">
-                <a16:creationId xmlns:a16="http://schemas.microsoft.com/office/drawing/2014/main" id="{EBCFF1F9-D793-4787-905B-5E4E34611D23}"/>
+                <a16:creationId xmlns:a16="http://schemas.microsoft.com/office/drawing/2014/main" id="{B766C7AB-F776-4907-A300-36761FD12B6B}"/>
               </a:ext>
             </a:extLst>
           </p:cNvPr>
@@ -2456,7 +2456,7 @@
           <p:cNvPr id="12" name="bullet-3">
             <a:extLst xmlns:a="http://schemas.openxmlformats.org/drawingml/2006/main">
               <a:ext uri="{FF2B5EF4-FFF2-40B4-BE49-F238E27FC236}">
-                <a16:creationId xmlns:a16="http://schemas.microsoft.com/office/drawing/2014/main" id="{79071D3C-823D-4BE7-8BEA-A93198606787}"/>
+                <a16:creationId xmlns:a16="http://schemas.microsoft.com/office/drawing/2014/main" id="{EC6F5E11-E7A6-4E3C-A6A0-700A22B01CF2}"/>
               </a:ext>
             </a:extLst>
           </p:cNvPr>
@@ -2487,7 +2487,7 @@
           <p:cNvPr id="13" name="bullet-number-3">
             <a:extLst xmlns:a="http://schemas.openxmlformats.org/drawingml/2006/main">
               <a:ext uri="{FF2B5EF4-FFF2-40B4-BE49-F238E27FC236}">
-                <a16:creationId xmlns:a16="http://schemas.microsoft.com/office/drawing/2014/main" id="{B66A6C83-B577-4DFC-8280-019FDE5F0E01}"/>
+                <a16:creationId xmlns:a16="http://schemas.microsoft.com/office/drawing/2014/main" id="{A5ECECA8-D92D-4D02-B391-A3F4A1227F31}"/>
               </a:ext>
             </a:extLst>
           </p:cNvPr>
@@ -2537,7 +2537,7 @@
           <p:cNvPr id="14" name="bullet-copy-3">
             <a:extLst xmlns:a="http://schemas.openxmlformats.org/drawingml/2006/main">
               <a:ext uri="{FF2B5EF4-FFF2-40B4-BE49-F238E27FC236}">
-                <a16:creationId xmlns:a16="http://schemas.microsoft.com/office/drawing/2014/main" id="{C8185CB6-8653-469C-84C1-417A89007D5D}"/>
+                <a16:creationId xmlns:a16="http://schemas.microsoft.com/office/drawing/2014/main" id="{C8C9523F-2094-4BEF-9495-B160729572DE}"/>
               </a:ext>
             </a:extLst>
           </p:cNvPr>
@@ -2585,7 +2585,7 @@
     </p:spTree>
     <p:extLst>
       <p:ext uri="{BB962C8B-B14F-4D97-AF65-F5344CB8AC3E}">
-        <p14:creationId xmlns:p14="http://schemas.microsoft.com/office/powerpoint/2010/main" val="167721228"/>
+        <p14:creationId xmlns:p14="http://schemas.microsoft.com/office/powerpoint/2010/main" val="1044721338"/>
       </p:ext>
     </p:extLst>
   </p:cSld>
@@ -2616,7 +2616,7 @@
           <p:cNvPr id="15" name="top-rule">
             <a:extLst xmlns:a="http://schemas.openxmlformats.org/drawingml/2006/main">
               <a:ext uri="{FF2B5EF4-FFF2-40B4-BE49-F238E27FC236}">
-                <a16:creationId xmlns:a16="http://schemas.microsoft.com/office/drawing/2014/main" id="{44ABAD00-703D-44CE-BF8A-0C7D87361C73}"/>
+                <a16:creationId xmlns:a16="http://schemas.microsoft.com/office/drawing/2014/main" id="{DFC8344A-3198-432C-B895-0D52254DD46E}"/>
               </a:ext>
             </a:extLst>
           </p:cNvPr>
@@ -2647,7 +2647,7 @@
           <p:cNvPr id="2" name="course-label">
             <a:extLst xmlns:a="http://schemas.openxmlformats.org/drawingml/2006/main">
               <a:ext uri="{FF2B5EF4-FFF2-40B4-BE49-F238E27FC236}">
-                <a16:creationId xmlns:a16="http://schemas.microsoft.com/office/drawing/2014/main" id="{C01AC197-03E3-4ED1-80EE-830358A7A631}"/>
+                <a16:creationId xmlns:a16="http://schemas.microsoft.com/office/drawing/2014/main" id="{B5ADCAFC-D3E4-4219-BC0A-F4F0EC994ABC}"/>
               </a:ext>
             </a:extLst>
           </p:cNvPr>
@@ -2697,7 +2697,7 @@
           <p:cNvPr id="3" name="module-label">
             <a:extLst xmlns:a="http://schemas.openxmlformats.org/drawingml/2006/main">
               <a:ext uri="{FF2B5EF4-FFF2-40B4-BE49-F238E27FC236}">
-                <a16:creationId xmlns:a16="http://schemas.microsoft.com/office/drawing/2014/main" id="{1C70B8E0-8820-461C-825B-E2EB2BB0E57B}"/>
+                <a16:creationId xmlns:a16="http://schemas.microsoft.com/office/drawing/2014/main" id="{A1A99A05-8E16-4908-BEE4-CA59C051D85C}"/>
               </a:ext>
             </a:extLst>
           </p:cNvPr>
@@ -2747,7 +2747,7 @@
           <p:cNvPr id="4" name="slide-title">
             <a:extLst xmlns:a="http://schemas.openxmlformats.org/drawingml/2006/main">
               <a:ext uri="{FF2B5EF4-FFF2-40B4-BE49-F238E27FC236}">
-                <a16:creationId xmlns:a16="http://schemas.microsoft.com/office/drawing/2014/main" id="{2426894D-7223-4060-B6EE-7BFAEF3C9A05}"/>
+                <a16:creationId xmlns:a16="http://schemas.microsoft.com/office/drawing/2014/main" id="{CB864635-14C0-4A8E-9C55-059477CEDFD0}"/>
               </a:ext>
             </a:extLst>
           </p:cNvPr>
@@ -2797,7 +2797,7 @@
           <p:cNvPr id="5" name="slide-subtitle">
             <a:extLst xmlns:a="http://schemas.openxmlformats.org/drawingml/2006/main">
               <a:ext uri="{FF2B5EF4-FFF2-40B4-BE49-F238E27FC236}">
-                <a16:creationId xmlns:a16="http://schemas.microsoft.com/office/drawing/2014/main" id="{92DA3728-C076-4B69-BF57-2A2A03236A52}"/>
+                <a16:creationId xmlns:a16="http://schemas.microsoft.com/office/drawing/2014/main" id="{F68FEA2D-91A0-4980-983B-4136E4B6D44A}"/>
               </a:ext>
             </a:extLst>
           </p:cNvPr>
@@ -2847,7 +2847,7 @@
           <p:cNvPr id="6" name="bullet-1">
             <a:extLst xmlns:a="http://schemas.openxmlformats.org/drawingml/2006/main">
               <a:ext uri="{FF2B5EF4-FFF2-40B4-BE49-F238E27FC236}">
-                <a16:creationId xmlns:a16="http://schemas.microsoft.com/office/drawing/2014/main" id="{8E245BCE-B44A-4BDE-92DE-1B681ED39E3C}"/>
+                <a16:creationId xmlns:a16="http://schemas.microsoft.com/office/drawing/2014/main" id="{3F6A8148-3A1D-4B22-94BB-8C2D32E57590}"/>
               </a:ext>
             </a:extLst>
           </p:cNvPr>
@@ -2878,7 +2878,7 @@
           <p:cNvPr id="7" name="bullet-number-1">
             <a:extLst xmlns:a="http://schemas.openxmlformats.org/drawingml/2006/main">
               <a:ext uri="{FF2B5EF4-FFF2-40B4-BE49-F238E27FC236}">
-                <a16:creationId xmlns:a16="http://schemas.microsoft.com/office/drawing/2014/main" id="{0D40AA6E-03C2-43B5-A62D-61109F99B25D}"/>
+                <a16:creationId xmlns:a16="http://schemas.microsoft.com/office/drawing/2014/main" id="{891B623A-EDDF-487E-B801-2BC6C6B9B065}"/>
               </a:ext>
             </a:extLst>
           </p:cNvPr>
@@ -2928,7 +2928,7 @@
           <p:cNvPr id="8" name="bullet-copy-1">
             <a:extLst xmlns:a="http://schemas.openxmlformats.org/drawingml/2006/main">
               <a:ext uri="{FF2B5EF4-FFF2-40B4-BE49-F238E27FC236}">
-                <a16:creationId xmlns:a16="http://schemas.microsoft.com/office/drawing/2014/main" id="{6D8C2BBA-1010-49DE-9FE8-CECE2B8AFF13}"/>
+                <a16:creationId xmlns:a16="http://schemas.microsoft.com/office/drawing/2014/main" id="{31AB700D-E6BB-4308-8071-D7EDFB6AC04F}"/>
               </a:ext>
             </a:extLst>
           </p:cNvPr>
@@ -2978,7 +2978,7 @@
           <p:cNvPr id="9" name="bullet-2">
             <a:extLst xmlns:a="http://schemas.openxmlformats.org/drawingml/2006/main">
               <a:ext uri="{FF2B5EF4-FFF2-40B4-BE49-F238E27FC236}">
-                <a16:creationId xmlns:a16="http://schemas.microsoft.com/office/drawing/2014/main" id="{82897E1E-A643-4359-85C9-AC31F21A390C}"/>
+                <a16:creationId xmlns:a16="http://schemas.microsoft.com/office/drawing/2014/main" id="{C7E2A464-F850-4BBF-BDFF-034F57424BAA}"/>
               </a:ext>
             </a:extLst>
           </p:cNvPr>
@@ -3009,7 +3009,7 @@
           <p:cNvPr id="10" name="bullet-number-2">
             <a:extLst xmlns:a="http://schemas.openxmlformats.org/drawingml/2006/main">
               <a:ext uri="{FF2B5EF4-FFF2-40B4-BE49-F238E27FC236}">
-                <a16:creationId xmlns:a16="http://schemas.microsoft.com/office/drawing/2014/main" id="{997C2129-FAC0-4991-954A-EDB9D9ABFA7E}"/>
+                <a16:creationId xmlns:a16="http://schemas.microsoft.com/office/drawing/2014/main" id="{C3657B33-BE42-41BE-B8C0-F9578DF01F42}"/>
               </a:ext>
             </a:extLst>
           </p:cNvPr>
@@ -3059,7 +3059,7 @@
           <p:cNvPr id="11" name="bullet-copy-2">
             <a:extLst xmlns:a="http://schemas.openxmlformats.org/drawingml/2006/main">
               <a:ext uri="{FF2B5EF4-FFF2-40B4-BE49-F238E27FC236}">
-                <a16:creationId xmlns:a16="http://schemas.microsoft.com/office/drawing/2014/main" id="{F9E394D0-4359-4748-92CB-4827714EF3DE}"/>
+                <a16:creationId xmlns:a16="http://schemas.microsoft.com/office/drawing/2014/main" id="{78A9A428-BD8E-445D-A775-DC3A0330AA97}"/>
               </a:ext>
             </a:extLst>
           </p:cNvPr>
@@ -3099,7 +3099,7 @@
                   <a:srgbClr val="16343A"/>
                 </a:solidFill>
               </a:rPr>
-              <a:t>A limited, deliberate colour scheme often creates a clearer identity than unrelated decoration.</a:t>
+              <a:t>Use contrast so a motif is visible, repetition to create rhythm, scale to suit the available area and proportion so decoration supports rather than overwhelms the form.</a:t>
             </a:r>
           </a:p>
         </p:txBody>
@@ -3109,7 +3109,7 @@
           <p:cNvPr id="12" name="bullet-3">
             <a:extLst xmlns:a="http://schemas.openxmlformats.org/drawingml/2006/main">
               <a:ext uri="{FF2B5EF4-FFF2-40B4-BE49-F238E27FC236}">
-                <a16:creationId xmlns:a16="http://schemas.microsoft.com/office/drawing/2014/main" id="{AA71A7AC-30DA-4B94-9BB7-4CC0373BB68E}"/>
+                <a16:creationId xmlns:a16="http://schemas.microsoft.com/office/drawing/2014/main" id="{565923D9-0886-4C79-9A00-B18EF4DA8162}"/>
               </a:ext>
             </a:extLst>
           </p:cNvPr>
@@ -3140,7 +3140,7 @@
           <p:cNvPr id="13" name="bullet-number-3">
             <a:extLst xmlns:a="http://schemas.openxmlformats.org/drawingml/2006/main">
               <a:ext uri="{FF2B5EF4-FFF2-40B4-BE49-F238E27FC236}">
-                <a16:creationId xmlns:a16="http://schemas.microsoft.com/office/drawing/2014/main" id="{2855946D-0D14-4B43-98F5-6AF1927E0D34}"/>
+                <a16:creationId xmlns:a16="http://schemas.microsoft.com/office/drawing/2014/main" id="{33CE468E-C23A-4A1C-85F6-BC1924DD85B2}"/>
               </a:ext>
             </a:extLst>
           </p:cNvPr>
@@ -3190,7 +3190,7 @@
           <p:cNvPr id="14" name="bullet-copy-3">
             <a:extLst xmlns:a="http://schemas.openxmlformats.org/drawingml/2006/main">
               <a:ext uri="{FF2B5EF4-FFF2-40B4-BE49-F238E27FC236}">
-                <a16:creationId xmlns:a16="http://schemas.microsoft.com/office/drawing/2014/main" id="{CBA48C2D-B288-4628-A669-13CB9DF7880A}"/>
+                <a16:creationId xmlns:a16="http://schemas.microsoft.com/office/drawing/2014/main" id="{E0FBA15E-C895-403E-8197-F3AA3AD9C8D4}"/>
               </a:ext>
             </a:extLst>
           </p:cNvPr>
@@ -3230,7 +3230,7 @@
                   <a:srgbClr val="16343A"/>
                 </a:solidFill>
               </a:rPr>
-              <a:t>Design for the intended user and connect decoration to the lunch-bag concept rather than adding features without purpose.</a:t>
+              <a:t>A motif that looks balanced alone may clash with a seam, closure or handle once positioned on the bag.</a:t>
             </a:r>
           </a:p>
         </p:txBody>
@@ -3238,7 +3238,7 @@
     </p:spTree>
     <p:extLst>
       <p:ext uri="{BB962C8B-B14F-4D97-AF65-F5344CB8AC3E}">
-        <p14:creationId xmlns:p14="http://schemas.microsoft.com/office/powerpoint/2010/main" val="255342989"/>
+        <p14:creationId xmlns:p14="http://schemas.microsoft.com/office/powerpoint/2010/main" val="359842802"/>
       </p:ext>
     </p:extLst>
   </p:cSld>
@@ -3269,7 +3269,7 @@
           <p:cNvPr id="12" name="top-rule">
             <a:extLst xmlns:a="http://schemas.openxmlformats.org/drawingml/2006/main">
               <a:ext uri="{FF2B5EF4-FFF2-40B4-BE49-F238E27FC236}">
-                <a16:creationId xmlns:a16="http://schemas.microsoft.com/office/drawing/2014/main" id="{491B4C7B-48B5-45E6-BB3B-853ED1E1D8BF}"/>
+                <a16:creationId xmlns:a16="http://schemas.microsoft.com/office/drawing/2014/main" id="{E9D83F1E-B35B-42CC-BA7E-3D6994422AD8}"/>
               </a:ext>
             </a:extLst>
           </p:cNvPr>
@@ -3300,7 +3300,7 @@
           <p:cNvPr id="2" name="course-label">
             <a:extLst xmlns:a="http://schemas.openxmlformats.org/drawingml/2006/main">
               <a:ext uri="{FF2B5EF4-FFF2-40B4-BE49-F238E27FC236}">
-                <a16:creationId xmlns:a16="http://schemas.microsoft.com/office/drawing/2014/main" id="{9824465A-37C4-4BD2-915B-D678A4E5F701}"/>
+                <a16:creationId xmlns:a16="http://schemas.microsoft.com/office/drawing/2014/main" id="{F4993F4F-EE6D-4B76-B6FB-4B1347115D5F}"/>
               </a:ext>
             </a:extLst>
           </p:cNvPr>
@@ -3350,7 +3350,7 @@
           <p:cNvPr id="3" name="module-label">
             <a:extLst xmlns:a="http://schemas.openxmlformats.org/drawingml/2006/main">
               <a:ext uri="{FF2B5EF4-FFF2-40B4-BE49-F238E27FC236}">
-                <a16:creationId xmlns:a16="http://schemas.microsoft.com/office/drawing/2014/main" id="{B858A4BA-51A8-4727-A30D-D26C097852E3}"/>
+                <a16:creationId xmlns:a16="http://schemas.microsoft.com/office/drawing/2014/main" id="{D982B15A-7B88-4D0E-9758-A4969CD51020}"/>
               </a:ext>
             </a:extLst>
           </p:cNvPr>
@@ -3400,7 +3400,7 @@
           <p:cNvPr id="4" name="slide-title">
             <a:extLst xmlns:a="http://schemas.openxmlformats.org/drawingml/2006/main">
               <a:ext uri="{FF2B5EF4-FFF2-40B4-BE49-F238E27FC236}">
-                <a16:creationId xmlns:a16="http://schemas.microsoft.com/office/drawing/2014/main" id="{F82BB45C-4049-4FBB-A530-0C6F9DF62F5B}"/>
+                <a16:creationId xmlns:a16="http://schemas.microsoft.com/office/drawing/2014/main" id="{FBE68867-C7E9-4915-82AF-736B906980B0}"/>
               </a:ext>
             </a:extLst>
           </p:cNvPr>
@@ -3450,7 +3450,7 @@
           <p:cNvPr id="5" name="slide-subtitle">
             <a:extLst xmlns:a="http://schemas.openxmlformats.org/drawingml/2006/main">
               <a:ext uri="{FF2B5EF4-FFF2-40B4-BE49-F238E27FC236}">
-                <a16:creationId xmlns:a16="http://schemas.microsoft.com/office/drawing/2014/main" id="{4B31A654-2D06-474B-B5E2-DD57AFA0E701}"/>
+                <a16:creationId xmlns:a16="http://schemas.microsoft.com/office/drawing/2014/main" id="{96988C2D-E8FE-40B9-BE9E-0D5F10E9D36B}"/>
               </a:ext>
             </a:extLst>
           </p:cNvPr>
@@ -3500,7 +3500,7 @@
           <p:cNvPr id="6" name="prompt-accent">
             <a:extLst xmlns:a="http://schemas.openxmlformats.org/drawingml/2006/main">
               <a:ext uri="{FF2B5EF4-FFF2-40B4-BE49-F238E27FC236}">
-                <a16:creationId xmlns:a16="http://schemas.microsoft.com/office/drawing/2014/main" id="{F53B9C70-FFBA-4CC5-B37B-ED36D8999A49}"/>
+                <a16:creationId xmlns:a16="http://schemas.microsoft.com/office/drawing/2014/main" id="{82481304-3AE6-49FC-A5C8-C29232372AA8}"/>
               </a:ext>
             </a:extLst>
           </p:cNvPr>
@@ -3531,7 +3531,7 @@
           <p:cNvPr id="7" name="plain-language">
             <a:extLst xmlns:a="http://schemas.openxmlformats.org/drawingml/2006/main">
               <a:ext uri="{FF2B5EF4-FFF2-40B4-BE49-F238E27FC236}">
-                <a16:creationId xmlns:a16="http://schemas.microsoft.com/office/drawing/2014/main" id="{CE03CB29-F3ED-417A-8653-8238947FB8A9}"/>
+                <a16:creationId xmlns:a16="http://schemas.microsoft.com/office/drawing/2014/main" id="{3B46ECB5-48E9-4E10-B571-40824AA4A1B3}"/>
               </a:ext>
             </a:extLst>
           </p:cNvPr>
@@ -3581,7 +3581,7 @@
           <p:cNvPr id="8" name="clarify">
             <a:extLst xmlns:a="http://schemas.openxmlformats.org/drawingml/2006/main">
               <a:ext uri="{FF2B5EF4-FFF2-40B4-BE49-F238E27FC236}">
-                <a16:creationId xmlns:a16="http://schemas.microsoft.com/office/drawing/2014/main" id="{937F43E8-DBA9-4D00-B5EE-198386185733}"/>
+                <a16:creationId xmlns:a16="http://schemas.microsoft.com/office/drawing/2014/main" id="{317A6B53-EC25-4441-A2C2-1881DEB3C58F}"/>
               </a:ext>
             </a:extLst>
           </p:cNvPr>
@@ -3631,7 +3631,7 @@
           <p:cNvPr id="9" name="starter-label">
             <a:extLst xmlns:a="http://schemas.openxmlformats.org/drawingml/2006/main">
               <a:ext uri="{FF2B5EF4-FFF2-40B4-BE49-F238E27FC236}">
-                <a16:creationId xmlns:a16="http://schemas.microsoft.com/office/drawing/2014/main" id="{DB7A7565-8FC4-4A66-AA4D-46B6DF6A111D}"/>
+                <a16:creationId xmlns:a16="http://schemas.microsoft.com/office/drawing/2014/main" id="{32BFE0EF-7337-40C6-9E9D-C5B17002523E}"/>
               </a:ext>
             </a:extLst>
           </p:cNvPr>
@@ -3681,7 +3681,7 @@
           <p:cNvPr id="10" name="starter">
             <a:extLst xmlns:a="http://schemas.openxmlformats.org/drawingml/2006/main">
               <a:ext uri="{FF2B5EF4-FFF2-40B4-BE49-F238E27FC236}">
-                <a16:creationId xmlns:a16="http://schemas.microsoft.com/office/drawing/2014/main" id="{F4C8CC0B-E731-4344-938D-D878E35CAA64}"/>
+                <a16:creationId xmlns:a16="http://schemas.microsoft.com/office/drawing/2014/main" id="{362005B0-8898-42E3-A1C2-FDE5436AC8C4}"/>
               </a:ext>
             </a:extLst>
           </p:cNvPr>
@@ -3731,7 +3731,7 @@
           <p:cNvPr id="11" name="action">
             <a:extLst xmlns:a="http://schemas.openxmlformats.org/drawingml/2006/main">
               <a:ext uri="{FF2B5EF4-FFF2-40B4-BE49-F238E27FC236}">
-                <a16:creationId xmlns:a16="http://schemas.microsoft.com/office/drawing/2014/main" id="{D1AD5A28-84F1-4E07-BB6D-A4FA230D3BEC}"/>
+                <a16:creationId xmlns:a16="http://schemas.microsoft.com/office/drawing/2014/main" id="{5EEDC9E1-0013-4677-B2C3-B13D866D1328}"/>
               </a:ext>
             </a:extLst>
           </p:cNvPr>
@@ -3779,7 +3779,7 @@
     </p:spTree>
     <p:extLst>
       <p:ext uri="{BB962C8B-B14F-4D97-AF65-F5344CB8AC3E}">
-        <p14:creationId xmlns:p14="http://schemas.microsoft.com/office/powerpoint/2010/main" val="580249928"/>
+        <p14:creationId xmlns:p14="http://schemas.microsoft.com/office/powerpoint/2010/main" val="1792838275"/>
       </p:ext>
     </p:extLst>
   </p:cSld>
@@ -3810,7 +3810,7 @@
           <p:cNvPr id="15" name="top-rule">
             <a:extLst xmlns:a="http://schemas.openxmlformats.org/drawingml/2006/main">
               <a:ext uri="{FF2B5EF4-FFF2-40B4-BE49-F238E27FC236}">
-                <a16:creationId xmlns:a16="http://schemas.microsoft.com/office/drawing/2014/main" id="{17E74D92-D90F-4BFB-A2F5-2B60A73553A2}"/>
+                <a16:creationId xmlns:a16="http://schemas.microsoft.com/office/drawing/2014/main" id="{87AC6D2C-6397-4395-A21B-D2E11B29C6D7}"/>
               </a:ext>
             </a:extLst>
           </p:cNvPr>
@@ -3841,7 +3841,7 @@
           <p:cNvPr id="2" name="course-label">
             <a:extLst xmlns:a="http://schemas.openxmlformats.org/drawingml/2006/main">
               <a:ext uri="{FF2B5EF4-FFF2-40B4-BE49-F238E27FC236}">
-                <a16:creationId xmlns:a16="http://schemas.microsoft.com/office/drawing/2014/main" id="{94602AAC-DC46-435C-9B08-199CD207F075}"/>
+                <a16:creationId xmlns:a16="http://schemas.microsoft.com/office/drawing/2014/main" id="{D8932EBC-2CE3-46E1-BC9D-559CEEBF34D9}"/>
               </a:ext>
             </a:extLst>
           </p:cNvPr>
@@ -3891,7 +3891,7 @@
           <p:cNvPr id="3" name="module-label">
             <a:extLst xmlns:a="http://schemas.openxmlformats.org/drawingml/2006/main">
               <a:ext uri="{FF2B5EF4-FFF2-40B4-BE49-F238E27FC236}">
-                <a16:creationId xmlns:a16="http://schemas.microsoft.com/office/drawing/2014/main" id="{C0405472-58A8-4995-BE68-C853BFEF4894}"/>
+                <a16:creationId xmlns:a16="http://schemas.microsoft.com/office/drawing/2014/main" id="{AE68A16B-460B-4109-B851-A1200398A87D}"/>
               </a:ext>
             </a:extLst>
           </p:cNvPr>
@@ -3941,7 +3941,7 @@
           <p:cNvPr id="4" name="slide-title">
             <a:extLst xmlns:a="http://schemas.openxmlformats.org/drawingml/2006/main">
               <a:ext uri="{FF2B5EF4-FFF2-40B4-BE49-F238E27FC236}">
-                <a16:creationId xmlns:a16="http://schemas.microsoft.com/office/drawing/2014/main" id="{BC35DF95-85FB-47B2-8B62-38370C367B7E}"/>
+                <a16:creationId xmlns:a16="http://schemas.microsoft.com/office/drawing/2014/main" id="{D2AF398A-93C2-445A-AC8A-07591438A0D1}"/>
               </a:ext>
             </a:extLst>
           </p:cNvPr>
@@ -3991,7 +3991,7 @@
           <p:cNvPr id="5" name="slide-subtitle">
             <a:extLst xmlns:a="http://schemas.openxmlformats.org/drawingml/2006/main">
               <a:ext uri="{FF2B5EF4-FFF2-40B4-BE49-F238E27FC236}">
-                <a16:creationId xmlns:a16="http://schemas.microsoft.com/office/drawing/2014/main" id="{19E55444-CC67-468E-AF46-8CAB36EC8B76}"/>
+                <a16:creationId xmlns:a16="http://schemas.microsoft.com/office/drawing/2014/main" id="{7E1A8DF9-A27A-43F1-BFDE-6AD3D4930D61}"/>
               </a:ext>
             </a:extLst>
           </p:cNvPr>
@@ -4041,7 +4041,7 @@
           <p:cNvPr id="6" name="bullet-1">
             <a:extLst xmlns:a="http://schemas.openxmlformats.org/drawingml/2006/main">
               <a:ext uri="{FF2B5EF4-FFF2-40B4-BE49-F238E27FC236}">
-                <a16:creationId xmlns:a16="http://schemas.microsoft.com/office/drawing/2014/main" id="{CD704AED-8F7A-4977-9EE3-1520C0A93A0E}"/>
+                <a16:creationId xmlns:a16="http://schemas.microsoft.com/office/drawing/2014/main" id="{C2471703-1CCC-4845-B274-99777E544D12}"/>
               </a:ext>
             </a:extLst>
           </p:cNvPr>
@@ -4072,7 +4072,7 @@
           <p:cNvPr id="7" name="bullet-number-1">
             <a:extLst xmlns:a="http://schemas.openxmlformats.org/drawingml/2006/main">
               <a:ext uri="{FF2B5EF4-FFF2-40B4-BE49-F238E27FC236}">
-                <a16:creationId xmlns:a16="http://schemas.microsoft.com/office/drawing/2014/main" id="{2DF7B30A-A514-4724-A3DF-5B91B5DBB683}"/>
+                <a16:creationId xmlns:a16="http://schemas.microsoft.com/office/drawing/2014/main" id="{F347BA6D-5A60-4DAF-978D-2EFCCED7F1CA}"/>
               </a:ext>
             </a:extLst>
           </p:cNvPr>
@@ -4122,7 +4122,7 @@
           <p:cNvPr id="8" name="bullet-copy-1">
             <a:extLst xmlns:a="http://schemas.openxmlformats.org/drawingml/2006/main">
               <a:ext uri="{FF2B5EF4-FFF2-40B4-BE49-F238E27FC236}">
-                <a16:creationId xmlns:a16="http://schemas.microsoft.com/office/drawing/2014/main" id="{DD7E591E-18AC-4D16-B37A-444E32682229}"/>
+                <a16:creationId xmlns:a16="http://schemas.microsoft.com/office/drawing/2014/main" id="{91D80DDF-2908-4E38-8BC5-881B66DD54DF}"/>
               </a:ext>
             </a:extLst>
           </p:cNvPr>
@@ -4172,7 +4172,7 @@
           <p:cNvPr id="9" name="bullet-2">
             <a:extLst xmlns:a="http://schemas.openxmlformats.org/drawingml/2006/main">
               <a:ext uri="{FF2B5EF4-FFF2-40B4-BE49-F238E27FC236}">
-                <a16:creationId xmlns:a16="http://schemas.microsoft.com/office/drawing/2014/main" id="{3F91E5F6-6D14-4908-B389-85265F0FA25A}"/>
+                <a16:creationId xmlns:a16="http://schemas.microsoft.com/office/drawing/2014/main" id="{7C7B8FB5-9EF0-4822-8BEE-166C4E1F22DC}"/>
               </a:ext>
             </a:extLst>
           </p:cNvPr>
@@ -4203,7 +4203,7 @@
           <p:cNvPr id="10" name="bullet-number-2">
             <a:extLst xmlns:a="http://schemas.openxmlformats.org/drawingml/2006/main">
               <a:ext uri="{FF2B5EF4-FFF2-40B4-BE49-F238E27FC236}">
-                <a16:creationId xmlns:a16="http://schemas.microsoft.com/office/drawing/2014/main" id="{4327FA73-B96C-42B8-9870-BF2FEABCB3DF}"/>
+                <a16:creationId xmlns:a16="http://schemas.microsoft.com/office/drawing/2014/main" id="{6A3CE35A-567D-4109-9ED6-951398F6169C}"/>
               </a:ext>
             </a:extLst>
           </p:cNvPr>
@@ -4253,7 +4253,7 @@
           <p:cNvPr id="11" name="bullet-copy-2">
             <a:extLst xmlns:a="http://schemas.openxmlformats.org/drawingml/2006/main">
               <a:ext uri="{FF2B5EF4-FFF2-40B4-BE49-F238E27FC236}">
-                <a16:creationId xmlns:a16="http://schemas.microsoft.com/office/drawing/2014/main" id="{B236E526-8EB6-48CC-AB9D-543493F349C8}"/>
+                <a16:creationId xmlns:a16="http://schemas.microsoft.com/office/drawing/2014/main" id="{47B95F5F-BB8D-4782-AFA0-A58CB5FD030A}"/>
               </a:ext>
             </a:extLst>
           </p:cNvPr>
@@ -4293,7 +4293,7 @@
                   <a:srgbClr val="16343A"/>
                 </a:solidFill>
               </a:rPr>
-              <a:t>Accurate templates, careful placement and controlled edges help the result look intentional.</a:t>
+              <a:t>Applique quality depends on a chain of decisions: template accuracy, grain and fabric behaviour, cutting control, placement, temporary holding, edge treatment and sti…</a:t>
             </a:r>
           </a:p>
         </p:txBody>
@@ -4303,7 +4303,7 @@
           <p:cNvPr id="12" name="bullet-3">
             <a:extLst xmlns:a="http://schemas.openxmlformats.org/drawingml/2006/main">
               <a:ext uri="{FF2B5EF4-FFF2-40B4-BE49-F238E27FC236}">
-                <a16:creationId xmlns:a16="http://schemas.microsoft.com/office/drawing/2014/main" id="{0B4EE7BB-FFFD-498B-BA48-5D907674E5A7}"/>
+                <a16:creationId xmlns:a16="http://schemas.microsoft.com/office/drawing/2014/main" id="{879930D4-0368-458F-86BA-71600FFF870D}"/>
               </a:ext>
             </a:extLst>
           </p:cNvPr>
@@ -4334,7 +4334,7 @@
           <p:cNvPr id="13" name="bullet-number-3">
             <a:extLst xmlns:a="http://schemas.openxmlformats.org/drawingml/2006/main">
               <a:ext uri="{FF2B5EF4-FFF2-40B4-BE49-F238E27FC236}">
-                <a16:creationId xmlns:a16="http://schemas.microsoft.com/office/drawing/2014/main" id="{7E7F4128-6F5C-448C-A7C1-5E1890FFFD1F}"/>
+                <a16:creationId xmlns:a16="http://schemas.microsoft.com/office/drawing/2014/main" id="{3137FAA4-9D19-4D49-9C51-A5D74AC1DCD3}"/>
               </a:ext>
             </a:extLst>
           </p:cNvPr>
@@ -4384,7 +4384,7 @@
           <p:cNvPr id="14" name="bullet-copy-3">
             <a:extLst xmlns:a="http://schemas.openxmlformats.org/drawingml/2006/main">
               <a:ext uri="{FF2B5EF4-FFF2-40B4-BE49-F238E27FC236}">
-                <a16:creationId xmlns:a16="http://schemas.microsoft.com/office/drawing/2014/main" id="{EB475F64-FEE1-4147-95B4-4E9C13BA042F}"/>
+                <a16:creationId xmlns:a16="http://schemas.microsoft.com/office/drawing/2014/main" id="{E5C7D91D-5772-4AEE-9B24-758BD87BB87D}"/>
               </a:ext>
             </a:extLst>
           </p:cNvPr>
@@ -4424,7 +4424,7 @@
                   <a:srgbClr val="16343A"/>
                 </a:solidFill>
               </a:rPr>
-              <a:t>The specific appliqué materials, adhesive products, stitch settings and pressing sequence must follow teacher instructions and product safety information.</a:t>
+              <a:t>They can be easier to cut and control, more readable from a distance and more durable around edges than shapes with many tight corners.</a:t>
             </a:r>
           </a:p>
         </p:txBody>
@@ -4432,7 +4432,7 @@
     </p:spTree>
     <p:extLst>
       <p:ext uri="{BB962C8B-B14F-4D97-AF65-F5344CB8AC3E}">
-        <p14:creationId xmlns:p14="http://schemas.microsoft.com/office/powerpoint/2010/main" val="595526173"/>
+        <p14:creationId xmlns:p14="http://schemas.microsoft.com/office/powerpoint/2010/main" val="864096919"/>
       </p:ext>
     </p:extLst>
   </p:cSld>
@@ -4463,7 +4463,7 @@
           <p:cNvPr id="12" name="top-rule">
             <a:extLst xmlns:a="http://schemas.openxmlformats.org/drawingml/2006/main">
               <a:ext uri="{FF2B5EF4-FFF2-40B4-BE49-F238E27FC236}">
-                <a16:creationId xmlns:a16="http://schemas.microsoft.com/office/drawing/2014/main" id="{90D4A08A-3C14-4991-8A02-4DFC9781516B}"/>
+                <a16:creationId xmlns:a16="http://schemas.microsoft.com/office/drawing/2014/main" id="{FD50FCE7-BB6B-4545-BE26-2205F3DD0AA8}"/>
               </a:ext>
             </a:extLst>
           </p:cNvPr>
@@ -4494,7 +4494,7 @@
           <p:cNvPr id="2" name="course-label">
             <a:extLst xmlns:a="http://schemas.openxmlformats.org/drawingml/2006/main">
               <a:ext uri="{FF2B5EF4-FFF2-40B4-BE49-F238E27FC236}">
-                <a16:creationId xmlns:a16="http://schemas.microsoft.com/office/drawing/2014/main" id="{4FBBE821-914C-4E50-A221-78C7666AEFCB}"/>
+                <a16:creationId xmlns:a16="http://schemas.microsoft.com/office/drawing/2014/main" id="{89F04535-1FE6-44D1-9A40-344BF7110ED2}"/>
               </a:ext>
             </a:extLst>
           </p:cNvPr>
@@ -4544,7 +4544,7 @@
           <p:cNvPr id="3" name="module-label">
             <a:extLst xmlns:a="http://schemas.openxmlformats.org/drawingml/2006/main">
               <a:ext uri="{FF2B5EF4-FFF2-40B4-BE49-F238E27FC236}">
-                <a16:creationId xmlns:a16="http://schemas.microsoft.com/office/drawing/2014/main" id="{C6867341-8506-4117-8227-CBFDE8F28D03}"/>
+                <a16:creationId xmlns:a16="http://schemas.microsoft.com/office/drawing/2014/main" id="{4E7D5EAD-47D7-49BD-9A89-1462655091D6}"/>
               </a:ext>
             </a:extLst>
           </p:cNvPr>
@@ -4594,7 +4594,7 @@
           <p:cNvPr id="4" name="slide-title">
             <a:extLst xmlns:a="http://schemas.openxmlformats.org/drawingml/2006/main">
               <a:ext uri="{FF2B5EF4-FFF2-40B4-BE49-F238E27FC236}">
-                <a16:creationId xmlns:a16="http://schemas.microsoft.com/office/drawing/2014/main" id="{2BF406FC-2C14-4ED5-B728-450E1CB30CB6}"/>
+                <a16:creationId xmlns:a16="http://schemas.microsoft.com/office/drawing/2014/main" id="{48AD1ECF-E144-4A78-B666-AB57C74BFCBE}"/>
               </a:ext>
             </a:extLst>
           </p:cNvPr>
@@ -4644,7 +4644,7 @@
           <p:cNvPr id="5" name="slide-subtitle">
             <a:extLst xmlns:a="http://schemas.openxmlformats.org/drawingml/2006/main">
               <a:ext uri="{FF2B5EF4-FFF2-40B4-BE49-F238E27FC236}">
-                <a16:creationId xmlns:a16="http://schemas.microsoft.com/office/drawing/2014/main" id="{3406145B-A848-49C8-BAD6-391C8AC15CAF}"/>
+                <a16:creationId xmlns:a16="http://schemas.microsoft.com/office/drawing/2014/main" id="{C94955FF-FBD9-4712-95C7-9858DE5D80D7}"/>
               </a:ext>
             </a:extLst>
           </p:cNvPr>
@@ -4694,7 +4694,7 @@
           <p:cNvPr id="6" name="prompt-accent">
             <a:extLst xmlns:a="http://schemas.openxmlformats.org/drawingml/2006/main">
               <a:ext uri="{FF2B5EF4-FFF2-40B4-BE49-F238E27FC236}">
-                <a16:creationId xmlns:a16="http://schemas.microsoft.com/office/drawing/2014/main" id="{0F1B658E-6C2B-4EF2-8337-181FCC7D417D}"/>
+                <a16:creationId xmlns:a16="http://schemas.microsoft.com/office/drawing/2014/main" id="{08C853AA-0E31-45DF-8036-4F55A6FEFAE1}"/>
               </a:ext>
             </a:extLst>
           </p:cNvPr>
@@ -4725,7 +4725,7 @@
           <p:cNvPr id="7" name="plain-language">
             <a:extLst xmlns:a="http://schemas.openxmlformats.org/drawingml/2006/main">
               <a:ext uri="{FF2B5EF4-FFF2-40B4-BE49-F238E27FC236}">
-                <a16:creationId xmlns:a16="http://schemas.microsoft.com/office/drawing/2014/main" id="{0EB0EEF3-7D5D-4A23-89CE-426CE9C2FBE6}"/>
+                <a16:creationId xmlns:a16="http://schemas.microsoft.com/office/drawing/2014/main" id="{0542C19C-2EBF-41EC-A8F9-9B76AAE753B0}"/>
               </a:ext>
             </a:extLst>
           </p:cNvPr>
@@ -4775,7 +4775,7 @@
           <p:cNvPr id="8" name="clarify">
             <a:extLst xmlns:a="http://schemas.openxmlformats.org/drawingml/2006/main">
               <a:ext uri="{FF2B5EF4-FFF2-40B4-BE49-F238E27FC236}">
-                <a16:creationId xmlns:a16="http://schemas.microsoft.com/office/drawing/2014/main" id="{7F7FCB9A-08F0-4898-93A9-6D7909C80589}"/>
+                <a16:creationId xmlns:a16="http://schemas.microsoft.com/office/drawing/2014/main" id="{26803AD8-A8B9-43DB-AAA2-4860B7901CB1}"/>
               </a:ext>
             </a:extLst>
           </p:cNvPr>
@@ -4825,7 +4825,7 @@
           <p:cNvPr id="9" name="starter-label">
             <a:extLst xmlns:a="http://schemas.openxmlformats.org/drawingml/2006/main">
               <a:ext uri="{FF2B5EF4-FFF2-40B4-BE49-F238E27FC236}">
-                <a16:creationId xmlns:a16="http://schemas.microsoft.com/office/drawing/2014/main" id="{86FE627C-5DDC-45F6-A011-40F22A3FDAA1}"/>
+                <a16:creationId xmlns:a16="http://schemas.microsoft.com/office/drawing/2014/main" id="{F678BA2E-8E74-4D88-B05E-031418B662FD}"/>
               </a:ext>
             </a:extLst>
           </p:cNvPr>
@@ -4875,7 +4875,7 @@
           <p:cNvPr id="10" name="starter">
             <a:extLst xmlns:a="http://schemas.openxmlformats.org/drawingml/2006/main">
               <a:ext uri="{FF2B5EF4-FFF2-40B4-BE49-F238E27FC236}">
-                <a16:creationId xmlns:a16="http://schemas.microsoft.com/office/drawing/2014/main" id="{3EBD5745-0F66-4D64-95A7-0333F605AB7E}"/>
+                <a16:creationId xmlns:a16="http://schemas.microsoft.com/office/drawing/2014/main" id="{70581E17-14AE-4DAE-AEBA-1677AA2CAF8D}"/>
               </a:ext>
             </a:extLst>
           </p:cNvPr>
@@ -4925,7 +4925,7 @@
           <p:cNvPr id="11" name="action">
             <a:extLst xmlns:a="http://schemas.openxmlformats.org/drawingml/2006/main">
               <a:ext uri="{FF2B5EF4-FFF2-40B4-BE49-F238E27FC236}">
-                <a16:creationId xmlns:a16="http://schemas.microsoft.com/office/drawing/2014/main" id="{941827DE-6AC3-444B-B6FC-02FE62ADBCD3}"/>
+                <a16:creationId xmlns:a16="http://schemas.microsoft.com/office/drawing/2014/main" id="{6455593E-7869-4E2D-992D-A63B7232A3BF}"/>
               </a:ext>
             </a:extLst>
           </p:cNvPr>
@@ -4973,7 +4973,7 @@
     </p:spTree>
     <p:extLst>
       <p:ext uri="{BB962C8B-B14F-4D97-AF65-F5344CB8AC3E}">
-        <p14:creationId xmlns:p14="http://schemas.microsoft.com/office/powerpoint/2010/main" val="918114158"/>
+        <p14:creationId xmlns:p14="http://schemas.microsoft.com/office/powerpoint/2010/main" val="581619447"/>
       </p:ext>
     </p:extLst>
   </p:cSld>
@@ -5004,7 +5004,7 @@
           <p:cNvPr id="15" name="top-rule">
             <a:extLst xmlns:a="http://schemas.openxmlformats.org/drawingml/2006/main">
               <a:ext uri="{FF2B5EF4-FFF2-40B4-BE49-F238E27FC236}">
-                <a16:creationId xmlns:a16="http://schemas.microsoft.com/office/drawing/2014/main" id="{DAF24902-E976-4E1F-B0B5-5B2D4B4CF9A8}"/>
+                <a16:creationId xmlns:a16="http://schemas.microsoft.com/office/drawing/2014/main" id="{5CD73125-1DB9-4094-B112-E30E9EB02A55}"/>
               </a:ext>
             </a:extLst>
           </p:cNvPr>
@@ -5035,7 +5035,7 @@
           <p:cNvPr id="2" name="course-label">
             <a:extLst xmlns:a="http://schemas.openxmlformats.org/drawingml/2006/main">
               <a:ext uri="{FF2B5EF4-FFF2-40B4-BE49-F238E27FC236}">
-                <a16:creationId xmlns:a16="http://schemas.microsoft.com/office/drawing/2014/main" id="{7FA3BA6B-0B74-49E5-AF12-4DD3809151AA}"/>
+                <a16:creationId xmlns:a16="http://schemas.microsoft.com/office/drawing/2014/main" id="{DBB9DC05-BD85-4762-B4D1-29768AEE3F43}"/>
               </a:ext>
             </a:extLst>
           </p:cNvPr>
@@ -5085,7 +5085,7 @@
           <p:cNvPr id="3" name="module-label">
             <a:extLst xmlns:a="http://schemas.openxmlformats.org/drawingml/2006/main">
               <a:ext uri="{FF2B5EF4-FFF2-40B4-BE49-F238E27FC236}">
-                <a16:creationId xmlns:a16="http://schemas.microsoft.com/office/drawing/2014/main" id="{FF51D6FD-341C-4658-92BE-C96441130023}"/>
+                <a16:creationId xmlns:a16="http://schemas.microsoft.com/office/drawing/2014/main" id="{C37A2E76-6010-4506-80EB-095835C7D737}"/>
               </a:ext>
             </a:extLst>
           </p:cNvPr>
@@ -5135,7 +5135,7 @@
           <p:cNvPr id="4" name="slide-title">
             <a:extLst xmlns:a="http://schemas.openxmlformats.org/drawingml/2006/main">
               <a:ext uri="{FF2B5EF4-FFF2-40B4-BE49-F238E27FC236}">
-                <a16:creationId xmlns:a16="http://schemas.microsoft.com/office/drawing/2014/main" id="{EBE5B8D8-D647-46D3-B11D-7DE778861AC0}"/>
+                <a16:creationId xmlns:a16="http://schemas.microsoft.com/office/drawing/2014/main" id="{DB9B5252-9064-4A76-9B6D-37732C9A1CDA}"/>
               </a:ext>
             </a:extLst>
           </p:cNvPr>
@@ -5185,7 +5185,7 @@
           <p:cNvPr id="5" name="slide-subtitle">
             <a:extLst xmlns:a="http://schemas.openxmlformats.org/drawingml/2006/main">
               <a:ext uri="{FF2B5EF4-FFF2-40B4-BE49-F238E27FC236}">
-                <a16:creationId xmlns:a16="http://schemas.microsoft.com/office/drawing/2014/main" id="{7E57CE1E-EC49-41D4-92CA-B0264CD11A5E}"/>
+                <a16:creationId xmlns:a16="http://schemas.microsoft.com/office/drawing/2014/main" id="{A4ADACD3-D8A1-4B43-8F61-3B0EAF82837C}"/>
               </a:ext>
             </a:extLst>
           </p:cNvPr>
@@ -5235,7 +5235,7 @@
           <p:cNvPr id="6" name="bullet-1">
             <a:extLst xmlns:a="http://schemas.openxmlformats.org/drawingml/2006/main">
               <a:ext uri="{FF2B5EF4-FFF2-40B4-BE49-F238E27FC236}">
-                <a16:creationId xmlns:a16="http://schemas.microsoft.com/office/drawing/2014/main" id="{33A42046-CACE-43B6-9AD5-3BEBDE5AD188}"/>
+                <a16:creationId xmlns:a16="http://schemas.microsoft.com/office/drawing/2014/main" id="{09DD71DE-B55E-4A9D-ACD1-839D376640FE}"/>
               </a:ext>
             </a:extLst>
           </p:cNvPr>
@@ -5266,7 +5266,7 @@
           <p:cNvPr id="7" name="bullet-number-1">
             <a:extLst xmlns:a="http://schemas.openxmlformats.org/drawingml/2006/main">
               <a:ext uri="{FF2B5EF4-FFF2-40B4-BE49-F238E27FC236}">
-                <a16:creationId xmlns:a16="http://schemas.microsoft.com/office/drawing/2014/main" id="{C95A03BF-3D20-476B-A248-741CB57B463A}"/>
+                <a16:creationId xmlns:a16="http://schemas.microsoft.com/office/drawing/2014/main" id="{7BFF37A9-2271-4418-855B-66E25D29A5F6}"/>
               </a:ext>
             </a:extLst>
           </p:cNvPr>
@@ -5316,7 +5316,7 @@
           <p:cNvPr id="8" name="bullet-copy-1">
             <a:extLst xmlns:a="http://schemas.openxmlformats.org/drawingml/2006/main">
               <a:ext uri="{FF2B5EF4-FFF2-40B4-BE49-F238E27FC236}">
-                <a16:creationId xmlns:a16="http://schemas.microsoft.com/office/drawing/2014/main" id="{9F1C8A96-C309-452B-B089-12070EEBE455}"/>
+                <a16:creationId xmlns:a16="http://schemas.microsoft.com/office/drawing/2014/main" id="{534CC043-A648-46C8-B735-CE11FFEE098E}"/>
               </a:ext>
             </a:extLst>
           </p:cNvPr>
@@ -5366,7 +5366,7 @@
           <p:cNvPr id="9" name="bullet-2">
             <a:extLst xmlns:a="http://schemas.openxmlformats.org/drawingml/2006/main">
               <a:ext uri="{FF2B5EF4-FFF2-40B4-BE49-F238E27FC236}">
-                <a16:creationId xmlns:a16="http://schemas.microsoft.com/office/drawing/2014/main" id="{88B7B7AB-1D76-4200-95AB-55AE5B072FCA}"/>
+                <a16:creationId xmlns:a16="http://schemas.microsoft.com/office/drawing/2014/main" id="{77EDDD4F-5EFB-47A8-8E3E-048CF89AC183}"/>
               </a:ext>
             </a:extLst>
           </p:cNvPr>
@@ -5397,7 +5397,7 @@
           <p:cNvPr id="10" name="bullet-number-2">
             <a:extLst xmlns:a="http://schemas.openxmlformats.org/drawingml/2006/main">
               <a:ext uri="{FF2B5EF4-FFF2-40B4-BE49-F238E27FC236}">
-                <a16:creationId xmlns:a16="http://schemas.microsoft.com/office/drawing/2014/main" id="{6EF8444F-C0F5-4110-AE00-900D3065F37C}"/>
+                <a16:creationId xmlns:a16="http://schemas.microsoft.com/office/drawing/2014/main" id="{DA53EC85-2769-444C-99E9-4BD9B7B214C9}"/>
               </a:ext>
             </a:extLst>
           </p:cNvPr>
@@ -5447,7 +5447,7 @@
           <p:cNvPr id="11" name="bullet-copy-2">
             <a:extLst xmlns:a="http://schemas.openxmlformats.org/drawingml/2006/main">
               <a:ext uri="{FF2B5EF4-FFF2-40B4-BE49-F238E27FC236}">
-                <a16:creationId xmlns:a16="http://schemas.microsoft.com/office/drawing/2014/main" id="{7706B220-2A89-4001-889D-E3CB71866F51}"/>
+                <a16:creationId xmlns:a16="http://schemas.microsoft.com/office/drawing/2014/main" id="{DF8B541D-C7CB-43DE-8CC3-85E8B0F19249}"/>
               </a:ext>
             </a:extLst>
           </p:cNvPr>
@@ -5487,7 +5487,7 @@
                   <a:srgbClr val="16343A"/>
                 </a:solidFill>
               </a:rPr>
-              <a:t>Testing on scrap material protects the project pieces from avoidable mistakes.</a:t>
+              <a:t>Keep the question focused: Does the colour contrast work?</a:t>
             </a:r>
           </a:p>
         </p:txBody>
@@ -5497,7 +5497,7 @@
           <p:cNvPr id="12" name="bullet-3">
             <a:extLst xmlns:a="http://schemas.openxmlformats.org/drawingml/2006/main">
               <a:ext uri="{FF2B5EF4-FFF2-40B4-BE49-F238E27FC236}">
-                <a16:creationId xmlns:a16="http://schemas.microsoft.com/office/drawing/2014/main" id="{32C3D7C1-1C0C-409E-9AC7-34A7D58C4E62}"/>
+                <a16:creationId xmlns:a16="http://schemas.microsoft.com/office/drawing/2014/main" id="{29B32BA4-1B2B-4E4C-B52F-F67820671DF8}"/>
               </a:ext>
             </a:extLst>
           </p:cNvPr>
@@ -5528,7 +5528,7 @@
           <p:cNvPr id="13" name="bullet-number-3">
             <a:extLst xmlns:a="http://schemas.openxmlformats.org/drawingml/2006/main">
               <a:ext uri="{FF2B5EF4-FFF2-40B4-BE49-F238E27FC236}">
-                <a16:creationId xmlns:a16="http://schemas.microsoft.com/office/drawing/2014/main" id="{A075895F-4F22-49F2-96A6-5D533DAEC98C}"/>
+                <a16:creationId xmlns:a16="http://schemas.microsoft.com/office/drawing/2014/main" id="{100743F3-E537-40B0-AF34-E3519A5ECA58}"/>
               </a:ext>
             </a:extLst>
           </p:cNvPr>
@@ -5578,7 +5578,7 @@
           <p:cNvPr id="14" name="bullet-copy-3">
             <a:extLst xmlns:a="http://schemas.openxmlformats.org/drawingml/2006/main">
               <a:ext uri="{FF2B5EF4-FFF2-40B4-BE49-F238E27FC236}">
-                <a16:creationId xmlns:a16="http://schemas.microsoft.com/office/drawing/2014/main" id="{4112AB11-AAC4-44C6-B636-02E8C6E9CE4D}"/>
+                <a16:creationId xmlns:a16="http://schemas.microsoft.com/office/drawing/2014/main" id="{83296B3D-221C-4ACB-A3FE-129C9885B2F5}"/>
               </a:ext>
             </a:extLst>
           </p:cNvPr>
@@ -5618,7 +5618,7 @@
                   <a:srgbClr val="16343A"/>
                 </a:solidFill>
               </a:rPr>
-              <a:t>Record what worked, what did not and the change you will make before producing the final decoration.</a:t>
+              <a:t>Record the setup, observe the result and change one feature before repeating when time allows.</a:t>
             </a:r>
           </a:p>
         </p:txBody>
@@ -5626,7 +5626,7 @@
     </p:spTree>
     <p:extLst>
       <p:ext uri="{BB962C8B-B14F-4D97-AF65-F5344CB8AC3E}">
-        <p14:creationId xmlns:p14="http://schemas.microsoft.com/office/powerpoint/2010/main" val="2081401298"/>
+        <p14:creationId xmlns:p14="http://schemas.microsoft.com/office/powerpoint/2010/main" val="1817702394"/>
       </p:ext>
     </p:extLst>
   </p:cSld>
@@ -5657,7 +5657,7 @@
           <p:cNvPr id="6" name="closing-rule">
             <a:extLst xmlns:a="http://schemas.openxmlformats.org/drawingml/2006/main">
               <a:ext uri="{FF2B5EF4-FFF2-40B4-BE49-F238E27FC236}">
-                <a16:creationId xmlns:a16="http://schemas.microsoft.com/office/drawing/2014/main" id="{04CDFB0C-BB46-476D-A153-A271A8EAA975}"/>
+                <a16:creationId xmlns:a16="http://schemas.microsoft.com/office/drawing/2014/main" id="{9DEF785C-4E4D-4BB5-AA00-84F786A8AA43}"/>
               </a:ext>
             </a:extLst>
           </p:cNvPr>
@@ -5688,7 +5688,7 @@
           <p:cNvPr id="2" name="closing-kicker">
             <a:extLst xmlns:a="http://schemas.openxmlformats.org/drawingml/2006/main">
               <a:ext uri="{FF2B5EF4-FFF2-40B4-BE49-F238E27FC236}">
-                <a16:creationId xmlns:a16="http://schemas.microsoft.com/office/drawing/2014/main" id="{B3A600F4-89FB-463A-87ED-83EB82D1934A}"/>
+                <a16:creationId xmlns:a16="http://schemas.microsoft.com/office/drawing/2014/main" id="{1C46CCD5-8076-4180-8817-E34AD1C9B3E5}"/>
               </a:ext>
             </a:extLst>
           </p:cNvPr>
@@ -5738,7 +5738,7 @@
           <p:cNvPr id="3" name="closing-title">
             <a:extLst xmlns:a="http://schemas.openxmlformats.org/drawingml/2006/main">
               <a:ext uri="{FF2B5EF4-FFF2-40B4-BE49-F238E27FC236}">
-                <a16:creationId xmlns:a16="http://schemas.microsoft.com/office/drawing/2014/main" id="{EF5AF409-2AAE-4FC1-A8CF-18BBD2EB13A4}"/>
+                <a16:creationId xmlns:a16="http://schemas.microsoft.com/office/drawing/2014/main" id="{09946E13-2D0A-447F-B94F-E706D9DC5B4C}"/>
               </a:ext>
             </a:extLst>
           </p:cNvPr>
@@ -5788,7 +5788,7 @@
           <p:cNvPr id="4" name="closing-copy">
             <a:extLst xmlns:a="http://schemas.openxmlformats.org/drawingml/2006/main">
               <a:ext uri="{FF2B5EF4-FFF2-40B4-BE49-F238E27FC236}">
-                <a16:creationId xmlns:a16="http://schemas.microsoft.com/office/drawing/2014/main" id="{F5202710-BDF4-4F63-9BEB-651146218BE0}"/>
+                <a16:creationId xmlns:a16="http://schemas.microsoft.com/office/drawing/2014/main" id="{0B28EF6B-C5D9-458B-947C-F4618CE8E752}"/>
               </a:ext>
             </a:extLst>
           </p:cNvPr>
@@ -5862,7 +5862,7 @@
                   <a:srgbClr val="E6F2EF"/>
                 </a:solidFill>
               </a:rPr>
-              <a:t>3. Continue Project Activity 8 and keep authentic evidence.</a:t>
+              <a:t>3. Continue the Designer and appliqué sample studio and keep authentic evidence.</a:t>
             </a:r>
           </a:p>
         </p:txBody>
@@ -5872,7 +5872,7 @@
           <p:cNvPr id="5" name="closing-boundary">
             <a:extLst xmlns:a="http://schemas.openxmlformats.org/drawingml/2006/main">
               <a:ext uri="{FF2B5EF4-FFF2-40B4-BE49-F238E27FC236}">
-                <a16:creationId xmlns:a16="http://schemas.microsoft.com/office/drawing/2014/main" id="{70B08D54-BCA1-4E8C-8161-A31A8871C271}"/>
+                <a16:creationId xmlns:a16="http://schemas.microsoft.com/office/drawing/2014/main" id="{C79198AB-9CC0-4950-BE76-495DAA68FAE2}"/>
               </a:ext>
             </a:extLst>
           </p:cNvPr>
@@ -5920,7 +5920,7 @@
     </p:spTree>
     <p:extLst>
       <p:ext uri="{BB962C8B-B14F-4D97-AF65-F5344CB8AC3E}">
-        <p14:creationId xmlns:p14="http://schemas.microsoft.com/office/powerpoint/2010/main" val="1174143518"/>
+        <p14:creationId xmlns:p14="http://schemas.microsoft.com/office/powerpoint/2010/main" val="909189361"/>
       </p:ext>
     </p:extLst>
   </p:cSld>
